--- a/slides/week-03-lecture-draft.pptx
+++ b/slides/week-03-lecture-draft.pptx
@@ -5641,7 +5641,7 @@
                 <a:ea typeface="Cambria" pitchFamily="34" charset="-122"/>
                 <a:cs typeface="Cambria" pitchFamily="34" charset="-120"/>
               </a:rPr>
-              <a:t>Threes, one screen, eight stations</a:t>
+              <a:t>Threes, one screen, stations not answers</a:t>
             </a:r>
             <a:endParaRPr lang="en-US" sz="3400" dirty="0"/>
           </a:p>
@@ -6448,7 +6448,7 @@
                 <a:ea typeface="Calibri" pitchFamily="34" charset="-122"/>
                 <a:cs typeface="Calibri" pitchFamily="34" charset="-120"/>
               </a:rPr>
-              <a:t>change ONE decision — min_df · tf-idf · bigrams · C · class_weight — and fit again</a:t>
+              <a:t>the workbench: sweep min_df · tf-idf · bigrams · C · class_weight into one table</a:t>
             </a:r>
             <a:endParaRPr lang="en-US" sz="1350" dirty="0"/>
           </a:p>
@@ -6487,7 +6487,7 @@
                 <a:ea typeface="Calibri" pitchFamily="34" charset="-122"/>
                 <a:cs typeface="Calibri" pitchFamily="34" charset="-120"/>
               </a:rPr>
-              <a:t>8</a:t>
+              <a:t>8 or 9</a:t>
             </a:r>
             <a:endParaRPr lang="en-US" sz="1300" dirty="0"/>
           </a:p>
@@ -6526,6 +6526,84 @@
                 <a:ea typeface="Calibri" pitchFamily="34" charset="-122"/>
                 <a:cs typeface="Calibri" pitchFamily="34" charset="-120"/>
               </a:rPr>
+              <a:t>interrogate a weight (how many PEOPLE wrote it?) — or swap in your own two subreddits</a:t>
+            </a:r>
+            <a:endParaRPr lang="en-US" sz="1350" dirty="0"/>
+          </a:p>
+        </p:txBody>
+      </p:sp>
+      <p:sp>
+        <p:nvSpPr>
+          <p:cNvPr id="28" name="Text 26"/>
+          <p:cNvSpPr/>
+          <p:nvPr/>
+        </p:nvSpPr>
+        <p:spPr>
+          <a:xfrm>
+            <a:off x="731520" y="6309360"/>
+            <a:ext cx="822960" cy="320040"/>
+          </a:xfrm>
+          <a:prstGeom prst="rect">
+            <a:avLst/>
+          </a:prstGeom>
+          <a:noFill/>
+          <a:ln/>
+        </p:spPr>
+        <p:txBody>
+          <a:bodyPr wrap="square" lIns="0" tIns="0" rIns="0" bIns="0" rtlCol="0" anchor="ctr"/>
+          <a:lstStyle/>
+          <a:p>
+            <a:pPr indent="0" marL="0">
+              <a:buNone/>
+            </a:pPr>
+            <a:r>
+              <a:rPr lang="en-US" sz="1300" b="1" dirty="0">
+                <a:solidFill>
+                  <a:srgbClr val="7A3B2E"/>
+                </a:solidFill>
+                <a:latin typeface="Calibri" pitchFamily="34" charset="0"/>
+                <a:ea typeface="Calibri" pitchFamily="34" charset="-122"/>
+                <a:cs typeface="Calibri" pitchFamily="34" charset="-120"/>
+              </a:rPr>
+              <a:t>10</a:t>
+            </a:r>
+            <a:endParaRPr lang="en-US" sz="1300" dirty="0"/>
+          </a:p>
+        </p:txBody>
+      </p:sp>
+      <p:sp>
+        <p:nvSpPr>
+          <p:cNvPr id="29" name="Text 27"/>
+          <p:cNvSpPr/>
+          <p:nvPr/>
+        </p:nvSpPr>
+        <p:spPr>
+          <a:xfrm>
+            <a:off x="1645920" y="6309360"/>
+            <a:ext cx="9692640" cy="320040"/>
+          </a:xfrm>
+          <a:prstGeom prst="rect">
+            <a:avLst/>
+          </a:prstGeom>
+          <a:noFill/>
+          <a:ln/>
+        </p:spPr>
+        <p:txBody>
+          <a:bodyPr wrap="square" lIns="0" tIns="0" rIns="0" bIns="0" rtlCol="0" anchor="ctr"/>
+          <a:lstStyle/>
+          <a:p>
+            <a:pPr indent="0" marL="0">
+              <a:buNone/>
+            </a:pPr>
+            <a:r>
+              <a:rPr lang="en-US" sz="1350" dirty="0">
+                <a:solidFill>
+                  <a:srgbClr val="1A1A1A"/>
+                </a:solidFill>
+                <a:latin typeface="Calibri" pitchFamily="34" charset="0"/>
+                <a:ea typeface="Calibri" pitchFamily="34" charset="-122"/>
+                <a:cs typeface="Calibri" pitchFamily="34" charset="-120"/>
+              </a:rPr>
               <a:t>report back: ninety seconds</a:t>
             </a:r>
             <a:endParaRPr lang="en-US" sz="1350" dirty="0"/>
@@ -6534,7 +6612,7 @@
       </p:sp>
       <p:sp>
         <p:nvSpPr>
-          <p:cNvPr id="28" name="Text 26"/>
+          <p:cNvPr id="30" name="Text 28"/>
           <p:cNvSpPr/>
           <p:nvPr/>
         </p:nvSpPr>
@@ -6565,7 +6643,7 @@
                 <a:ea typeface="Calibri" pitchFamily="34" charset="-122"/>
                 <a:cs typeface="Calibri" pitchFamily="34" charset="-120"/>
               </a:rPr>
-              <a:t>Behind schedule? Stations 4, 5 and 7 are the ones that must happen. One model is a result; several are an argument.</a:t>
+              <a:t>Behind schedule? Stations 4, 5 and 7 are the ones that must happen. One model is a result; several are an argument — and 8 and 9 are where the homework starts.</a:t>
             </a:r>
             <a:endParaRPr lang="en-US" sz="1100" dirty="0"/>
           </a:p>
@@ -8506,7 +8584,7 @@
                 <a:ea typeface="Calibri" pitchFamily="34" charset="-122"/>
                 <a:cs typeface="Calibri" pitchFamily="34" charset="-120"/>
               </a:rPr>
-              <a:t>Threes, one screen, eight stations, one decision changed at a time</a:t>
+              <a:t>Threes, one screen, a workbench, and one decision changed at a time</a:t>
             </a:r>
             <a:endParaRPr lang="en-US" sz="1250" dirty="0"/>
           </a:p>

--- a/slides/week-03-lecture-draft.pptx
+++ b/slides/week-03-lecture-draft.pptx
@@ -2630,7 +2630,7 @@
                 <a:ea typeface="Calibri" pitchFamily="34" charset="-122"/>
                 <a:cs typeface="Calibri" pitchFamily="34" charset="-120"/>
               </a:rPr>
-              <a:t>Modelling in practice: one model built live on r/sandiego against r/SanDiegan,</a:t>
+              <a:t>Modelling in practice: one model built live on r/sandiego against r/bayarea,</a:t>
             </a:r>
             <a:endParaRPr lang="en-US" sz="1700" dirty="0"/>
           </a:p>
@@ -2913,7 +2913,7 @@
                 <a:ea typeface="Calibri" pitchFamily="34" charset="-122"/>
                 <a:cs typeface="Calibri" pitchFamily="34" charset="-120"/>
               </a:rPr>
-              <a:t>Here: 37 comments from r/sandiego called r/SanDiegan, and 37 the other way. Roughly even, which is the healthy shape.</a:t>
+              <a:t>Here: 23 comments from r/sandiego called r/bayarea, and 37 the other way. Roughly even, which is the healthy shape.</a:t>
             </a:r>
             <a:endParaRPr lang="en-US" sz="1400" dirty="0"/>
           </a:p>
@@ -3140,7 +3140,7 @@
                 <a:ea typeface="Calibri" pitchFamily="34" charset="-122"/>
                 <a:cs typeface="Calibri" pitchFamily="34" charset="-120"/>
               </a:rPr>
-              <a:t>Turn C up and the model trusts the training data harder. At C=100 it scores 100% on rows it trained on and 61% on rows it didn't.</a:t>
+              <a:t>Turn C up and the model trusts the training data harder. At C=100 it scores 100% on rows it trained on and 74% on rows it didn't.</a:t>
             </a:r>
             <a:endParaRPr lang="en-US" sz="1400" dirty="0"/>
           </a:p>
@@ -3188,7 +3188,7 @@
                 <a:ea typeface="Calibri" pitchFamily="34" charset="-122"/>
                 <a:cs typeface="Calibri" pitchFamily="34" charset="-120"/>
               </a:rPr>
-              <a:t>Best held-out score here: 65% at C=0.1. Note it is not at the far right.</a:t>
+              <a:t>Best held-out score here: 75% at C=0.3. Note it is not at the far right.</a:t>
             </a:r>
             <a:endParaRPr lang="en-US" sz="1400" dirty="0"/>
           </a:p>
@@ -3634,7 +3634,7 @@
               <a:buChar char="•"/>
             </a:pPr>
             <a:r>
-              <a:rPr lang="en-US" sz="1400" dirty="0">
+              <a:rPr lang="en-US" sz="1350" dirty="0">
                 <a:solidFill>
                   <a:srgbClr val="1A1A1A"/>
                 </a:solidFill>
@@ -3644,7 +3644,7 @@
               </a:rPr>
               <a:t>One number per word. Positive pushes one way, negative the other, and you can read every one of them.</a:t>
             </a:r>
-            <a:endParaRPr lang="en-US" sz="1400" dirty="0"/>
+            <a:endParaRPr lang="en-US" sz="1350" dirty="0"/>
           </a:p>
           <a:p>
             <a:pPr marL="152400" indent="-152400">
@@ -3658,7 +3658,7 @@
               <a:buChar char="•"/>
             </a:pPr>
             <a:r>
-              <a:rPr lang="en-US" sz="1400" dirty="0">
+              <a:rPr lang="en-US" sz="1350" dirty="0">
                 <a:solidFill>
                   <a:srgbClr val="1A1A1A"/>
                 </a:solidFill>
@@ -3666,9 +3666,9 @@
                 <a:ea typeface="Calibri" pitchFamily="34" charset="-122"/>
                 <a:cs typeface="Calibri" pitchFamily="34" charset="-120"/>
               </a:rPr>
-              <a:t>Most r/sandiego: 35, she, law, random, into.</a:t>
-            </a:r>
-            <a:endParaRPr lang="en-US" sz="1400" dirty="0"/>
+              <a:t>Most r/sandiego: diego, sd, parking, cause, search.</a:t>
+            </a:r>
+            <a:endParaRPr lang="en-US" sz="1350" dirty="0"/>
           </a:p>
           <a:p>
             <a:pPr marL="152400" indent="-152400">
@@ -3682,7 +3682,7 @@
               <a:buChar char="•"/>
             </a:pPr>
             <a:r>
-              <a:rPr lang="en-US" sz="1400" dirty="0">
+              <a:rPr lang="en-US" sz="1350" dirty="0">
                 <a:solidFill>
                   <a:srgbClr val="1A1A1A"/>
                 </a:solidFill>
@@ -3690,9 +3690,9 @@
                 <a:ea typeface="Calibri" pitchFamily="34" charset="-122"/>
                 <a:cs typeface="Calibri" pitchFamily="34" charset="-120"/>
               </a:rPr>
-              <a:t>Most r/SanDiegan: great, million, somewhere, believe, yes.</a:t>
-            </a:r>
-            <a:endParaRPr lang="en-US" sz="1400" dirty="0"/>
+              <a:t>Most r/bayarea: weather, nude, last, bay, frontier.</a:t>
+            </a:r>
+            <a:endParaRPr lang="en-US" sz="1350" dirty="0"/>
           </a:p>
           <a:p>
             <a:pPr marL="152400" indent="-152400">
@@ -3706,7 +3706,7 @@
               <a:buChar char="•"/>
             </a:pPr>
             <a:r>
-              <a:rPr lang="en-US" sz="1400" dirty="0">
+              <a:rPr lang="en-US" sz="1350" dirty="0">
                 <a:solidFill>
                   <a:srgbClr val="1A1A1A"/>
                 </a:solidFill>
@@ -3714,9 +3714,9 @@
                 <a:ea typeface="Calibri" pitchFamily="34" charset="-122"/>
                 <a:cs typeface="Calibri" pitchFamily="34" charset="-120"/>
               </a:rPr>
-              <a:t>A big weight is not proof of a big pattern: a rare word that happens to fall on one side gets a large coefficient. Check how many documents it is actually in.</a:t>
-            </a:r>
-            <a:endParaRPr lang="en-US" sz="1400" dirty="0"/>
+              <a:t>Place names lead the list, and that is correct and uninteresting: the model found the giveaway. The question starts one step later.</a:t>
+            </a:r>
+            <a:endParaRPr lang="en-US" sz="1350" dirty="0"/>
           </a:p>
           <a:p>
             <a:pPr marL="152400" indent="-152400">
@@ -3730,7 +3730,7 @@
               <a:buChar char="•"/>
             </a:pPr>
             <a:r>
-              <a:rPr lang="en-US" sz="1400" dirty="0">
+              <a:rPr lang="en-US" sz="1350" dirty="0">
                 <a:solidFill>
                   <a:srgbClr val="1A1A1A"/>
                 </a:solidFill>
@@ -3738,9 +3738,33 @@
                 <a:ea typeface="Calibri" pitchFamily="34" charset="-122"/>
                 <a:cs typeface="Calibri" pitchFamily="34" charset="-120"/>
               </a:rPr>
+              <a:t>Remove them and refit. If the accuracy collapses, the difference WAS the names. If it holds, the words underneath are the finding.</a:t>
+            </a:r>
+            <a:endParaRPr lang="en-US" sz="1350" dirty="0"/>
+          </a:p>
+          <a:p>
+            <a:pPr marL="152400" indent="-152400">
+              <a:lnSpc>
+                <a:spcPct val="115000"/>
+              </a:lnSpc>
+              <a:spcAft>
+                <a:spcPts val="1000"/>
+              </a:spcAft>
+              <a:buSzPct val="100000"/>
+              <a:buChar char="•"/>
+            </a:pPr>
+            <a:r>
+              <a:rPr lang="en-US" sz="1350" dirty="0">
+                <a:solidFill>
+                  <a:srgbClr val="1A1A1A"/>
+                </a:solidFill>
+                <a:latin typeface="Calibri" pitchFamily="34" charset="0"/>
+                <a:ea typeface="Calibri" pitchFamily="34" charset="-122"/>
+                <a:cs typeface="Calibri" pitchFamily="34" charset="-120"/>
+              </a:rPr>
               <a:t>Week 7's annotator is far more powerful and will not let you do any of this.</a:t>
             </a:r>
-            <a:endParaRPr lang="en-US" sz="1400" dirty="0"/>
+            <a:endParaRPr lang="en-US" sz="1350" dirty="0"/>
           </a:p>
         </p:txBody>
       </p:sp>
@@ -10637,7 +10661,7 @@
                 <a:ea typeface="Calibri" pitchFamily="34" charset="-122"/>
                 <a:cs typeface="Calibri" pitchFamily="34" charset="-120"/>
               </a:rPr>
-              <a:t>Our corpus: 800 documents, 2,087 word-columns after dropping words that appear once.</a:t>
+              <a:t>Our corpus: 887 documents, 2,333 word-columns after dropping words that appear once.</a:t>
             </a:r>
             <a:endParaRPr lang="en-US" sz="1500" dirty="0"/>
           </a:p>
@@ -10910,7 +10934,7 @@
                 <a:ea typeface="Cambria" pitchFamily="34" charset="-122"/>
                 <a:cs typeface="Cambria" pitchFamily="34" charset="-120"/>
               </a:rPr>
-              <a:t>Two communities, one city, heavily overlapping</a:t>
+              <a:t>Two regions, and how much they still overlap</a:t>
             </a:r>
             <a:endParaRPr lang="en-US" sz="3400" dirty="0"/>
           </a:p>
@@ -10979,7 +11003,7 @@
                 <a:ea typeface="Calibri" pitchFamily="34" charset="-122"/>
                 <a:cs typeface="Calibri" pitchFamily="34" charset="-120"/>
               </a:rPr>
-              <a:t>Every document is a point in 2,087-dimensional word-space. Here it is flattened to the two directions that carry the most variation.</a:t>
+              <a:t>Every document is a point in 2,333-dimensional word-space. Here it is flattened to the two directions that carry the most variation.</a:t>
             </a:r>
             <a:endParaRPr lang="en-US" sz="1400" dirty="0"/>
           </a:p>
@@ -11003,7 +11027,7 @@
                 <a:ea typeface="Calibri" pitchFamily="34" charset="-122"/>
                 <a:cs typeface="Calibri" pitchFamily="34" charset="-120"/>
               </a:rPr>
-              <a:t>The two piles sit on top of each other. The best straight line in this flattened view gets 56% right.</a:t>
+              <a:t>Even two different regions overlap heavily: the best straight line in this flattened view gets 55% right.</a:t>
             </a:r>
             <a:endParaRPr lang="en-US" sz="1400" dirty="0"/>
           </a:p>
@@ -11027,7 +11051,7 @@
                 <a:ea typeface="Calibri" pitchFamily="34" charset="-122"/>
                 <a:cs typeface="Calibri" pitchFamily="34" charset="-120"/>
               </a:rPr>
-              <a:t>With all 2,087 columns the model reaches 63% — better, because the separating evidence lives in directions this picture cannot show.</a:t>
+              <a:t>With all 2,333 columns the model reaches 73% — better, because the separating evidence lives in directions this picture cannot show.</a:t>
             </a:r>
             <a:endParaRPr lang="en-US" sz="1400" dirty="0"/>
           </a:p>
@@ -11051,7 +11075,7 @@
                 <a:ea typeface="Calibri" pitchFamily="34" charset="-122"/>
                 <a:cs typeface="Calibri" pitchFamily="34" charset="-120"/>
               </a:rPr>
-              <a:t>A hard pair is the honest case. Two unrelated subreddits would split cleanly and teach you nothing you didn't already know.</a:t>
+              <a:t>Swap in r/sandiego against r/SanDiegan — the same city, two communities — and the same code drops to about 0.60. That is the honest hard case, and the notebook offers it as hard mode.</a:t>
             </a:r>
             <a:endParaRPr lang="en-US" sz="1400" dirty="0"/>
           </a:p>
@@ -11254,7 +11278,7 @@
                 <a:ea typeface="Calibri" pitchFamily="34" charset="-122"/>
                 <a:cs typeface="Calibri" pitchFamily="34" charset="-120"/>
               </a:rPr>
-              <a:t>Ours lands at 63% on rows it never saw: real, and modest.</a:t>
+              <a:t>Ours lands at 73% on rows it never saw: real, and modest.</a:t>
             </a:r>
             <a:endParaRPr lang="en-US" sz="1400" dirty="0"/>
           </a:p>
@@ -11278,7 +11302,7 @@
                 <a:ea typeface="Calibri" pitchFamily="34" charset="-122"/>
                 <a:cs typeface="Calibri" pitchFamily="34" charset="-120"/>
               </a:rPr>
-              <a:t>Refit on five different splits it averages 0.58 ± 0.05 — so a two-point difference between two models is inside the noise.</a:t>
+              <a:t>Refit on five different splits it averages 0.73 ± 0.01 — so a two-point difference between two models is inside the noise.</a:t>
             </a:r>
             <a:endParaRPr lang="en-US" sz="1400" dirty="0"/>
           </a:p>
